--- a/morning-registration-activities/small-wins-board/downloads/Small_Wins_Board.pptx
+++ b/morning-registration-activities/small-wins-board/downloads/Small_Wins_Board.pptx
@@ -1010,9 +1010,9 @@
                 <a:solidFill>
                   <a:srgbClr val="9AB196"/>
                 </a:solidFill>
-                <a:latin typeface="Karla" pitchFamily="34" charset="0"/>
-                <a:ea typeface="Karla" pitchFamily="34" charset="-122"/>
-                <a:cs typeface="Karla" pitchFamily="34" charset="-120"/>
+                <a:latin typeface="Calibri" pitchFamily="34" charset="0"/>
+                <a:ea typeface="Calibri" pitchFamily="34" charset="-122"/>
+                <a:cs typeface="Calibri" pitchFamily="34" charset="-120"/>
               </a:rPr>
               <a:t>MORNING REGISTRATION ACTIVITIES</a:t>
             </a:r>
@@ -1045,13 +1045,13 @@
               <a:buNone/>
             </a:pPr>
             <a:r>
-              <a:rPr lang="en-US" sz="4800" b="1" dirty="0">
+              <a:rPr lang="en-US" sz="4800" b="0" dirty="0">
                 <a:solidFill>
                   <a:srgbClr val="799E81"/>
                 </a:solidFill>
-                <a:latin typeface="Libre Caslon Display" pitchFamily="34" charset="0"/>
-                <a:ea typeface="Libre Caslon Display" pitchFamily="34" charset="-122"/>
-                <a:cs typeface="Libre Caslon Display" pitchFamily="34" charset="-120"/>
+                <a:latin typeface="Georgia" pitchFamily="34" charset="0"/>
+                <a:ea typeface="Georgia" pitchFamily="34" charset="-122"/>
+                <a:cs typeface="Georgia" pitchFamily="34" charset="-120"/>
               </a:rPr>
               <a:t>Small Wins Board</a:t>
             </a:r>
@@ -1088,9 +1088,9 @@
                 <a:solidFill>
                   <a:srgbClr val="92A794"/>
                 </a:solidFill>
-                <a:latin typeface="Karla" pitchFamily="34" charset="0"/>
-                <a:ea typeface="Karla" pitchFamily="34" charset="-122"/>
-                <a:cs typeface="Karla" pitchFamily="34" charset="-120"/>
+                <a:latin typeface="Calibri" pitchFamily="34" charset="0"/>
+                <a:ea typeface="Calibri" pitchFamily="34" charset="-122"/>
+                <a:cs typeface="Calibri" pitchFamily="34" charset="-120"/>
               </a:rPr>
               <a:t>Write down one thing you’re proud of, from yesterday or today. Big or small, it counts.</a:t>
             </a:r>
@@ -1242,9 +1242,9 @@
                 <a:solidFill>
                   <a:srgbClr val="FFFDF7"/>
                 </a:solidFill>
-                <a:latin typeface="Karla" pitchFamily="34" charset="0"/>
-                <a:ea typeface="Karla" pitchFamily="34" charset="-122"/>
-                <a:cs typeface="Karla" pitchFamily="34" charset="-120"/>
+                <a:latin typeface="Calibri" pitchFamily="34" charset="0"/>
+                <a:ea typeface="Calibri" pitchFamily="34" charset="-122"/>
+                <a:cs typeface="Calibri" pitchFamily="34" charset="-120"/>
               </a:rPr>
               <a:t>1</a:t>
             </a:r>
@@ -1281,9 +1281,9 @@
                 <a:solidFill>
                   <a:srgbClr val="799E81"/>
                 </a:solidFill>
-                <a:latin typeface="Karla" pitchFamily="34" charset="0"/>
-                <a:ea typeface="Karla" pitchFamily="34" charset="-122"/>
-                <a:cs typeface="Karla" pitchFamily="34" charset="-120"/>
+                <a:latin typeface="Calibri" pitchFamily="34" charset="0"/>
+                <a:ea typeface="Calibri" pitchFamily="34" charset="-122"/>
+                <a:cs typeface="Calibri" pitchFamily="34" charset="-120"/>
               </a:rPr>
               <a:t>Think of one small win</a:t>
             </a:r>
@@ -1323,9 +1323,9 @@
                 <a:solidFill>
                   <a:srgbClr val="92A794"/>
                 </a:solidFill>
-                <a:latin typeface="Karla" pitchFamily="34" charset="0"/>
-                <a:ea typeface="Karla" pitchFamily="34" charset="-122"/>
-                <a:cs typeface="Karla" pitchFamily="34" charset="-120"/>
+                <a:latin typeface="Calibri" pitchFamily="34" charset="0"/>
+                <a:ea typeface="Calibri" pitchFamily="34" charset="-122"/>
+                <a:cs typeface="Calibri" pitchFamily="34" charset="-120"/>
               </a:rPr>
               <a:t>From yesterday, or today so far.</a:t>
             </a:r>
@@ -1477,9 +1477,9 @@
                 <a:solidFill>
                   <a:srgbClr val="FFFDF7"/>
                 </a:solidFill>
-                <a:latin typeface="Karla" pitchFamily="34" charset="0"/>
-                <a:ea typeface="Karla" pitchFamily="34" charset="-122"/>
-                <a:cs typeface="Karla" pitchFamily="34" charset="-120"/>
+                <a:latin typeface="Calibri" pitchFamily="34" charset="0"/>
+                <a:ea typeface="Calibri" pitchFamily="34" charset="-122"/>
+                <a:cs typeface="Calibri" pitchFamily="34" charset="-120"/>
               </a:rPr>
               <a:t>2</a:t>
             </a:r>
@@ -1516,9 +1516,9 @@
                 <a:solidFill>
                   <a:srgbClr val="799E81"/>
                 </a:solidFill>
-                <a:latin typeface="Karla" pitchFamily="34" charset="0"/>
-                <a:ea typeface="Karla" pitchFamily="34" charset="-122"/>
-                <a:cs typeface="Karla" pitchFamily="34" charset="-120"/>
+                <a:latin typeface="Calibri" pitchFamily="34" charset="0"/>
+                <a:ea typeface="Calibri" pitchFamily="34" charset="-122"/>
+                <a:cs typeface="Calibri" pitchFamily="34" charset="-120"/>
               </a:rPr>
               <a:t>Write it down</a:t>
             </a:r>
@@ -1558,9 +1558,9 @@
                 <a:solidFill>
                   <a:srgbClr val="92A794"/>
                 </a:solidFill>
-                <a:latin typeface="Karla" pitchFamily="34" charset="0"/>
-                <a:ea typeface="Karla" pitchFamily="34" charset="-122"/>
-                <a:cs typeface="Karla" pitchFamily="34" charset="-120"/>
+                <a:latin typeface="Calibri" pitchFamily="34" charset="0"/>
+                <a:ea typeface="Calibri" pitchFamily="34" charset="-122"/>
+                <a:cs typeface="Calibri" pitchFamily="34" charset="-120"/>
               </a:rPr>
               <a:t>A Post-it note, or a printable card.</a:t>
             </a:r>
@@ -1712,9 +1712,9 @@
                 <a:solidFill>
                   <a:srgbClr val="FFFDF7"/>
                 </a:solidFill>
-                <a:latin typeface="Karla" pitchFamily="34" charset="0"/>
-                <a:ea typeface="Karla" pitchFamily="34" charset="-122"/>
-                <a:cs typeface="Karla" pitchFamily="34" charset="-120"/>
+                <a:latin typeface="Calibri" pitchFamily="34" charset="0"/>
+                <a:ea typeface="Calibri" pitchFamily="34" charset="-122"/>
+                <a:cs typeface="Calibri" pitchFamily="34" charset="-120"/>
               </a:rPr>
               <a:t>3</a:t>
             </a:r>
@@ -1751,9 +1751,9 @@
                 <a:solidFill>
                   <a:srgbClr val="799E81"/>
                 </a:solidFill>
-                <a:latin typeface="Karla" pitchFamily="34" charset="0"/>
-                <a:ea typeface="Karla" pitchFamily="34" charset="-122"/>
-                <a:cs typeface="Karla" pitchFamily="34" charset="-120"/>
+                <a:latin typeface="Calibri" pitchFamily="34" charset="0"/>
+                <a:ea typeface="Calibri" pitchFamily="34" charset="-122"/>
+                <a:cs typeface="Calibri" pitchFamily="34" charset="-120"/>
               </a:rPr>
               <a:t>Add it to the board</a:t>
             </a:r>
@@ -1793,9 +1793,9 @@
                 <a:solidFill>
                   <a:srgbClr val="92A794"/>
                 </a:solidFill>
-                <a:latin typeface="Karla" pitchFamily="34" charset="0"/>
-                <a:ea typeface="Karla" pitchFamily="34" charset="-122"/>
-                <a:cs typeface="Karla" pitchFamily="34" charset="-120"/>
+                <a:latin typeface="Calibri" pitchFamily="34" charset="0"/>
+                <a:ea typeface="Calibri" pitchFamily="34" charset="-122"/>
+                <a:cs typeface="Calibri" pitchFamily="34" charset="-120"/>
               </a:rPr>
               <a:t>With a dab of Blu Tack.</a:t>
             </a:r>
@@ -1832,9 +1832,9 @@
                 <a:solidFill>
                   <a:srgbClr val="B8C5B7"/>
                 </a:solidFill>
-                <a:latin typeface="Karla" pitchFamily="34" charset="0"/>
-                <a:ea typeface="Karla" pitchFamily="34" charset="-122"/>
-                <a:cs typeface="Karla" pitchFamily="34" charset="-120"/>
+                <a:latin typeface="Calibri" pitchFamily="34" charset="0"/>
+                <a:ea typeface="Calibri" pitchFamily="34" charset="-122"/>
+                <a:cs typeface="Calibri" pitchFamily="34" charset="-120"/>
               </a:rPr>
               <a:t>Needs: Post-it notes or the printable Small Win cards (see the downloads), plus a little Blu Tack.</a:t>
             </a:r>
@@ -1895,9 +1895,9 @@
                 <a:solidFill>
                   <a:srgbClr val="B8C5B7"/>
                 </a:solidFill>
-                <a:latin typeface="Libre Caslon Display" pitchFamily="34" charset="0"/>
-                <a:ea typeface="Libre Caslon Display" pitchFamily="34" charset="-122"/>
-                <a:cs typeface="Libre Caslon Display" pitchFamily="34" charset="-120"/>
+                <a:latin typeface="Georgia" pitchFamily="34" charset="0"/>
+                <a:ea typeface="Georgia" pitchFamily="34" charset="-122"/>
+                <a:cs typeface="Georgia" pitchFamily="34" charset="-120"/>
               </a:rPr>
               <a:t>The Pastoral Guide</a:t>
             </a:r>
@@ -2126,13 +2126,13 @@
               <a:buNone/>
             </a:pPr>
             <a:r>
-              <a:rPr lang="en-US" sz="3600" b="1" dirty="0">
+              <a:rPr lang="en-US" sz="3600" b="0" dirty="0">
                 <a:solidFill>
                   <a:srgbClr val="799E81"/>
                 </a:solidFill>
-                <a:latin typeface="Libre Caslon Display" pitchFamily="34" charset="0"/>
-                <a:ea typeface="Libre Caslon Display" pitchFamily="34" charset="-122"/>
-                <a:cs typeface="Libre Caslon Display" pitchFamily="34" charset="-120"/>
+                <a:latin typeface="Georgia" pitchFamily="34" charset="0"/>
+                <a:ea typeface="Georgia" pitchFamily="34" charset="-122"/>
+                <a:cs typeface="Georgia" pitchFamily="34" charset="-120"/>
               </a:rPr>
               <a:t>Our Small Wins</a:t>
             </a:r>
@@ -2169,9 +2169,9 @@
                 <a:solidFill>
                   <a:srgbClr val="92A794"/>
                 </a:solidFill>
-                <a:latin typeface="Karla" pitchFamily="34" charset="0"/>
-                <a:ea typeface="Karla" pitchFamily="34" charset="-122"/>
-                <a:cs typeface="Karla" pitchFamily="34" charset="-120"/>
+                <a:latin typeface="Calibri" pitchFamily="34" charset="0"/>
+                <a:ea typeface="Calibri" pitchFamily="34" charset="-122"/>
+                <a:cs typeface="Calibri" pitchFamily="34" charset="-120"/>
               </a:rPr>
               <a:t>A place for the whole form to see what we’re proud of.</a:t>
             </a:r>
@@ -2208,9 +2208,9 @@
                 <a:solidFill>
                   <a:srgbClr val="B8C5B7"/>
                 </a:solidFill>
-                <a:latin typeface="Karla" pitchFamily="34" charset="0"/>
-                <a:ea typeface="Karla" pitchFamily="34" charset="-122"/>
-                <a:cs typeface="Karla" pitchFamily="34" charset="-120"/>
+                <a:latin typeface="Calibri" pitchFamily="34" charset="0"/>
+                <a:ea typeface="Calibri" pitchFamily="34" charset="-122"/>
+                <a:cs typeface="Calibri" pitchFamily="34" charset="-120"/>
               </a:rPr>
               <a:t>Stick a note here each time someone shares a small win. The board keeps growing all year.</a:t>
             </a:r>
@@ -2271,9 +2271,9 @@
                 <a:solidFill>
                   <a:srgbClr val="B8C5B7"/>
                 </a:solidFill>
-                <a:latin typeface="Libre Caslon Display" pitchFamily="34" charset="0"/>
-                <a:ea typeface="Libre Caslon Display" pitchFamily="34" charset="-122"/>
-                <a:cs typeface="Libre Caslon Display" pitchFamily="34" charset="-120"/>
+                <a:latin typeface="Georgia" pitchFamily="34" charset="0"/>
+                <a:ea typeface="Georgia" pitchFamily="34" charset="-122"/>
+                <a:cs typeface="Georgia" pitchFamily="34" charset="-120"/>
               </a:rPr>
               <a:t>The Pastoral Guide</a:t>
             </a:r>
